--- a/dist/초3/수학/자연수계산/초3_수학_자연수계산_11_몫에0이있는나눗셈.pptx
+++ b/dist/초3/수학/자연수계산/초3_수학_자연수계산_11_몫에0이있는나눗셈.pptx
@@ -120,13 +120,13 @@
   <p:extLst>
     <p:ext uri="{521415D9-36F7-43E2-AB2F-B90AF26B5E84}">
       <p14:sectionLst xmlns:p14="http://schemas.microsoft.com/office/powerpoint/2010/main">
-        <p14:section name="도입" id="{f2b5a594-dc65-e8f1-226f-25f9824d648e}">
+        <p14:section name="도입" id="{415c63f4-0395-9256-dc38-42776e5919b3}">
           <p14:sldIdLst>
             <p14:sldId id="256"/>
             <p14:sldId id="257"/>
           </p14:sldIdLst>
         </p14:section>
-        <p14:section name="개념" id="{a6bd7d94-f8b0-3410-4b3d-cf5f5a9a8db4}">
+        <p14:section name="개념" id="{a34b819a-1b62-c32a-63be-92d61dacd529}">
           <p14:sldIdLst>
             <p14:sldId id="258"/>
             <p14:sldId id="259"/>
@@ -134,32 +134,32 @@
             <p14:sldId id="262"/>
           </p14:sldIdLst>
         </p14:section>
-        <p14:section name="연습" id="{c810ee9d-8dff-de4a-a677-e1e11834ebf2}">
+        <p14:section name="연습" id="{ac379ea9-e8ef-5da1-a604-e9b47f7d8c33}">
           <p14:sldIdLst>
             <p14:sldId id="261"/>
             <p14:sldId id="263"/>
             <p14:sldId id="264"/>
           </p14:sldIdLst>
         </p14:section>
-        <p14:section name="개념" id="{eefcffd2-a20d-3d01-6a60-ee7070a8bcbb}">
+        <p14:section name="개념" id="{b59b03f5-572d-f4d6-b649-080b10746d29}">
           <p14:sldIdLst/>
         </p14:section>
-        <p14:section name="연습" id="{7ab1e6e7-d692-784e-f1f5-2e324d30a8d6}">
+        <p14:section name="연습" id="{525be636-5e46-c2f6-4f04-efae39677556}">
           <p14:sldIdLst/>
         </p14:section>
-        <p14:section name="확인" id="{fc516ec4-5233-b5e4-126b-829ff6bd28d1}">
+        <p14:section name="확인" id="{1ae340aa-679a-d27e-2f89-9ba499c97c1f}">
           <p14:sldIdLst>
             <p14:sldId id="265"/>
             <p14:sldId id="266"/>
             <p14:sldId id="267"/>
           </p14:sldIdLst>
         </p14:section>
-        <p14:section name="정리" id="{a5cf63d0-4db4-22ed-e850-38c65646eab1}">
+        <p14:section name="정리" id="{c11e4609-5142-f39f-084f-9c0ed301f0ad}">
           <p14:sldIdLst>
             <p14:sldId id="268"/>
           </p14:sldIdLst>
         </p14:section>
-        <p14:section name="보충" id="{ae5b015a-7a94-4a1a-4f70-dc028dcb9f8d}">
+        <p14:section name="보충" id="{c5f508e6-bf21-075e-d17a-39fd5035820f}">
           <p14:sldIdLst>
             <p14:sldId id="269"/>
           </p14:sldIdLst>
